--- a/docs/2026-2/cea055-estatistica-probabilidade/12-modelos-continuos-i/arquivos/Aula_12_Modelos_Continuos_I.pptx
+++ b/docs/2026-2/cea055-estatistica-probabilidade/12-modelos-continuos-i/arquivos/Aula_12_Modelos_Continuos_I.pptx
@@ -9335,7 +9335,7 @@
                       <a:rPr lang="pt-BR" sz="2800" b="0" i="1" smtClean="0">
                         <a:latin typeface="Cambria Math" panose="02040503050406030204" pitchFamily="18" charset="0"/>
                       </a:rPr>
-                      <m:t>𝛽</m:t>
+                      <m:t>𝜆</m:t>
                     </m:r>
                     <m:r>
                       <a:rPr lang="pt-BR" sz="2800" i="1" dirty="0" smtClean="0">
